--- a/Report/Report_1027.pptx
+++ b/Report/Report_1027.pptx
@@ -8,15 +8,14 @@
     <p:notesMasterId r:id="rId4"/>
   </p:notesMasterIdLst>
   <p:sldIdLst>
-    <p:sldId id="336" r:id="rId3"/>
-    <p:sldId id="342" r:id="rId5"/>
-    <p:sldId id="337" r:id="rId6"/>
-    <p:sldId id="329" r:id="rId7"/>
-    <p:sldId id="339" r:id="rId8"/>
-    <p:sldId id="340" r:id="rId9"/>
-    <p:sldId id="341" r:id="rId10"/>
-    <p:sldId id="343" r:id="rId11"/>
-    <p:sldId id="344" r:id="rId12"/>
+    <p:sldId id="342" r:id="rId3"/>
+    <p:sldId id="337" r:id="rId5"/>
+    <p:sldId id="329" r:id="rId6"/>
+    <p:sldId id="339" r:id="rId7"/>
+    <p:sldId id="340" r:id="rId8"/>
+    <p:sldId id="341" r:id="rId9"/>
+    <p:sldId id="343" r:id="rId10"/>
+    <p:sldId id="344" r:id="rId11"/>
   </p:sldIdLst>
   <p:sldSz cx="9144000" cy="6858000"/>
   <p:notesSz cx="6858000" cy="9144000"/>
@@ -704,70 +703,6 @@
 </file>
 
 <file path=ppt/notesSlides/notesSlide8.xml><?xml version="1.0" encoding="utf-8"?>
-<p:notes xmlns:a="http://schemas.openxmlformats.org/drawingml/2006/main" xmlns:r="http://schemas.openxmlformats.org/officeDocument/2006/relationships" xmlns:p="http://schemas.openxmlformats.org/presentationml/2006/main">
-  <p:cSld>
-    <p:spTree>
-      <p:nvGrpSpPr>
-        <p:cNvPr id="1" name=""/>
-        <p:cNvGrpSpPr/>
-        <p:nvPr/>
-      </p:nvGrpSpPr>
-      <p:grpSpPr/>
-      <p:sp>
-        <p:nvSpPr>
-          <p:cNvPr id="2" name="Slide Image Placeholder 1"/>
-          <p:cNvSpPr>
-            <a:spLocks noGrp="1"/>
-          </p:cNvSpPr>
-          <p:nvPr>
-            <p:ph type="sldImg"/>
-          </p:nvPr>
-        </p:nvSpPr>
-        <p:spPr/>
-      </p:sp>
-      <p:sp>
-        <p:nvSpPr>
-          <p:cNvPr id="3" name="Notes Placeholder 2"/>
-          <p:cNvSpPr>
-            <a:spLocks noGrp="1"/>
-          </p:cNvSpPr>
-          <p:nvPr>
-            <p:ph type="body" idx="1"/>
-          </p:nvPr>
-        </p:nvSpPr>
-        <p:spPr/>
-        <p:txBody>
-          <a:bodyPr/>
-          <a:lstStyle/>
-          <a:p/>
-        </p:txBody>
-      </p:sp>
-      <p:sp>
-        <p:nvSpPr>
-          <p:cNvPr id="4" name="Slide Number Placeholder 3"/>
-          <p:cNvSpPr>
-            <a:spLocks noGrp="1"/>
-          </p:cNvSpPr>
-          <p:nvPr>
-            <p:ph type="sldNum" idx="5"/>
-          </p:nvPr>
-        </p:nvSpPr>
-        <p:spPr/>
-        <p:txBody>
-          <a:bodyPr/>
-          <a:lstStyle/>
-          <a:p/>
-        </p:txBody>
-      </p:sp>
-    </p:spTree>
-  </p:cSld>
-  <p:clrMapOvr>
-    <a:masterClrMapping/>
-  </p:clrMapOvr>
-</p:notes>
-</file>
-
-<file path=ppt/notesSlides/notesSlide9.xml><?xml version="1.0" encoding="utf-8"?>
 <p:notes xmlns:a="http://schemas.openxmlformats.org/drawingml/2006/main" xmlns:r="http://schemas.openxmlformats.org/officeDocument/2006/relationships" xmlns:p="http://schemas.openxmlformats.org/presentationml/2006/main">
   <p:cSld>
     <p:spTree>
@@ -3689,6 +3624,63 @@
         <p:nvPr/>
       </p:nvGrpSpPr>
       <p:grpSpPr/>
+      <p:pic>
+        <p:nvPicPr>
+          <p:cNvPr id="4" name="图片 3" descr="distance_aperture_by_speed_vertical"/>
+          <p:cNvPicPr>
+            <a:picLocks noChangeAspect="1"/>
+          </p:cNvPicPr>
+          <p:nvPr/>
+        </p:nvPicPr>
+        <p:blipFill>
+          <a:blip r:embed="rId1"/>
+          <a:stretch>
+            <a:fillRect/>
+          </a:stretch>
+        </p:blipFill>
+        <p:spPr>
+          <a:xfrm>
+            <a:off x="857250" y="941070"/>
+            <a:ext cx="7429500" cy="5916930"/>
+          </a:xfrm>
+          <a:prstGeom prst="rect">
+            <a:avLst/>
+          </a:prstGeom>
+        </p:spPr>
+      </p:pic>
+      <p:sp>
+        <p:nvSpPr>
+          <p:cNvPr id="3" name="文本框 2"/>
+          <p:cNvSpPr txBox="1"/>
+          <p:nvPr/>
+        </p:nvSpPr>
+        <p:spPr>
+          <a:xfrm>
+            <a:off x="394970" y="151130"/>
+            <a:ext cx="8347075" cy="645160"/>
+          </a:xfrm>
+          <a:prstGeom prst="rect">
+            <a:avLst/>
+          </a:prstGeom>
+          <a:noFill/>
+        </p:spPr>
+        <p:txBody>
+          <a:bodyPr wrap="square" rtlCol="0">
+            <a:spAutoFit/>
+          </a:bodyPr>
+          <a:p>
+            <a:r>
+              <a:rPr lang="en-US" altLang="zh-CN">
+                <a:ea typeface="SimSun" panose="02010600030101010101" pitchFamily="2" charset="-122"/>
+              </a:rPr>
+              <a:t>Each speed condition includes 28 trials: 21 for training and 7 for testing. I mistakenly selected two fewer test trials per condition than intended.</a:t>
+            </a:r>
+            <a:endParaRPr lang="en-US" altLang="zh-CN">
+              <a:ea typeface="SimSun" panose="02010600030101010101" pitchFamily="2" charset="-122"/>
+            </a:endParaRPr>
+          </a:p>
+        </p:txBody>
+      </p:sp>
     </p:spTree>
   </p:cSld>
   <p:clrMapOvr>
@@ -3716,7 +3708,7 @@
       <p:grpSpPr/>
       <p:pic>
         <p:nvPicPr>
-          <p:cNvPr id="4" name="图片 3" descr="distance_aperture_by_speed_vertical"/>
+          <p:cNvPr id="2" name="图片 1" descr="test_model_comparison"/>
           <p:cNvPicPr>
             <a:picLocks noChangeAspect="1"/>
           </p:cNvPicPr>
@@ -3730,8 +3722,8 @@
         </p:blipFill>
         <p:spPr>
           <a:xfrm>
-            <a:off x="857250" y="796290"/>
-            <a:ext cx="7429500" cy="5916930"/>
+            <a:off x="0" y="3036570"/>
+            <a:ext cx="9144000" cy="3429000"/>
           </a:xfrm>
           <a:prstGeom prst="rect">
             <a:avLst/>
@@ -3746,8 +3738,8 @@
         </p:nvSpPr>
         <p:spPr>
           <a:xfrm>
-            <a:off x="394970" y="151130"/>
-            <a:ext cx="6282055" cy="645160"/>
+            <a:off x="578485" y="479425"/>
+            <a:ext cx="5819775" cy="368300"/>
           </a:xfrm>
           <a:prstGeom prst="rect">
             <a:avLst/>
@@ -3760,60 +3752,87 @@
           </a:bodyPr>
           <a:p>
             <a:r>
-              <a:rPr lang="zh-CN">
-                <a:ea typeface="SimSun" panose="02010600030101010101" pitchFamily="2" charset="-122"/>
-              </a:rPr>
-              <a:t>各速度总</a:t>
-            </a:r>
+              <a:rPr lang="en-US" altLang="zh-CN"/>
+              <a:t>Offline Testing: Overall Performance</a:t>
+            </a:r>
+            <a:endParaRPr lang="en-US" altLang="zh-CN"/>
+          </a:p>
+        </p:txBody>
+      </p:sp>
+      <p:sp>
+        <p:nvSpPr>
+          <p:cNvPr id="4" name="文本框 3"/>
+          <p:cNvSpPr txBox="1"/>
+          <p:nvPr/>
+        </p:nvSpPr>
+        <p:spPr>
+          <a:xfrm>
+            <a:off x="578485" y="1021080"/>
+            <a:ext cx="7668260" cy="922020"/>
+          </a:xfrm>
+          <a:prstGeom prst="rect">
+            <a:avLst/>
+          </a:prstGeom>
+          <a:noFill/>
+        </p:spPr>
+        <p:txBody>
+          <a:bodyPr wrap="square" rtlCol="0">
+            <a:spAutoFit/>
+          </a:bodyPr>
+          <a:p>
             <a:r>
               <a:rPr lang="en-US" altLang="zh-CN">
                 <a:ea typeface="SimSun" panose="02010600030101010101" pitchFamily="2" charset="-122"/>
               </a:rPr>
-              <a:t>28</a:t>
+              <a:t>Three models</a:t>
             </a:r>
             <a:r>
               <a:rPr lang="zh-CN" altLang="en-US">
                 <a:ea typeface="SimSun" panose="02010600030101010101" pitchFamily="2" charset="-122"/>
               </a:rPr>
-              <a:t>组数据，</a:t>
-            </a:r>
+              <a:t>：</a:t>
+            </a:r>
+            <a:endParaRPr lang="zh-CN" altLang="en-US">
+              <a:ea typeface="SimSun" panose="02010600030101010101" pitchFamily="2" charset="-122"/>
+            </a:endParaRPr>
+          </a:p>
+          <a:p>
+            <a:endParaRPr lang="en-US" altLang="zh-CN">
+              <a:ea typeface="SimSun" panose="02010600030101010101" pitchFamily="2" charset="-122"/>
+            </a:endParaRPr>
+          </a:p>
+          <a:p>
             <a:r>
               <a:rPr lang="en-US" altLang="zh-CN">
                 <a:ea typeface="SimSun" panose="02010600030101010101" pitchFamily="2" charset="-122"/>
               </a:rPr>
-              <a:t>21</a:t>
+              <a:t>smoothing spline</a:t>
             </a:r>
             <a:r>
               <a:rPr lang="zh-CN" altLang="en-US">
                 <a:ea typeface="SimSun" panose="02010600030101010101" pitchFamily="2" charset="-122"/>
               </a:rPr>
-              <a:t>组训练，</a:t>
+              <a:t>，</a:t>
             </a:r>
             <a:r>
               <a:rPr lang="en-US" altLang="zh-CN">
                 <a:ea typeface="SimSun" panose="02010600030101010101" pitchFamily="2" charset="-122"/>
               </a:rPr>
-              <a:t>7</a:t>
+              <a:t>MLP (5 frames)</a:t>
             </a:r>
             <a:r>
               <a:rPr lang="zh-CN" altLang="en-US">
                 <a:ea typeface="SimSun" panose="02010600030101010101" pitchFamily="2" charset="-122"/>
               </a:rPr>
-              <a:t>组测试（失误选取了</a:t>
+              <a:t>，</a:t>
             </a:r>
             <a:r>
               <a:rPr lang="en-US" altLang="zh-CN">
                 <a:ea typeface="SimSun" panose="02010600030101010101" pitchFamily="2" charset="-122"/>
               </a:rPr>
-              <a:t>2</a:t>
-            </a:r>
-            <a:r>
-              <a:rPr lang="zh-CN" altLang="en-US">
-                <a:ea typeface="SimSun" panose="02010600030101010101" pitchFamily="2" charset="-122"/>
-              </a:rPr>
-              <a:t>组）。数据集还是周末录制的数据</a:t>
-            </a:r>
-            <a:endParaRPr lang="zh-CN" altLang="en-US">
+              <a:t>LSTM (from time 0 to the estimated time)</a:t>
+            </a:r>
+            <a:endParaRPr lang="en-US" altLang="zh-CN">
               <a:ea typeface="SimSun" panose="02010600030101010101" pitchFamily="2" charset="-122"/>
             </a:endParaRPr>
           </a:p>
@@ -3844,9 +3863,38 @@
         <p:nvPr/>
       </p:nvGrpSpPr>
       <p:grpSpPr/>
+      <p:sp>
+        <p:nvSpPr>
+          <p:cNvPr id="8" name="文本框 7"/>
+          <p:cNvSpPr txBox="1"/>
+          <p:nvPr/>
+        </p:nvSpPr>
+        <p:spPr>
+          <a:xfrm>
+            <a:off x="283845" y="379730"/>
+            <a:ext cx="3048000" cy="368300"/>
+          </a:xfrm>
+          <a:prstGeom prst="rect">
+            <a:avLst/>
+          </a:prstGeom>
+          <a:noFill/>
+        </p:spPr>
+        <p:txBody>
+          <a:bodyPr wrap="square" rtlCol="0">
+            <a:spAutoFit/>
+          </a:bodyPr>
+          <a:p>
+            <a:r>
+              <a:rPr lang="en-US" altLang="zh-CN"/>
+              <a:t>Slow Example</a:t>
+            </a:r>
+            <a:endParaRPr lang="en-US" altLang="zh-CN"/>
+          </a:p>
+        </p:txBody>
+      </p:sp>
       <p:pic>
         <p:nvPicPr>
-          <p:cNvPr id="2" name="图片 1" descr="test_model_comparison"/>
+          <p:cNvPr id="3" name="图片 2" descr="Black_4cm_20261025_151105"/>
           <p:cNvPicPr>
             <a:picLocks noChangeAspect="1"/>
           </p:cNvPicPr>
@@ -3860,128 +3908,62 @@
         </p:blipFill>
         <p:spPr>
           <a:xfrm>
-            <a:off x="0" y="3036570"/>
-            <a:ext cx="9144000" cy="3429000"/>
+            <a:off x="3495675" y="2245360"/>
+            <a:ext cx="5648325" cy="2237105"/>
           </a:xfrm>
           <a:prstGeom prst="rect">
             <a:avLst/>
           </a:prstGeom>
         </p:spPr>
       </p:pic>
-      <p:sp>
-        <p:nvSpPr>
-          <p:cNvPr id="3" name="文本框 2"/>
-          <p:cNvSpPr txBox="1"/>
+      <p:pic>
+        <p:nvPicPr>
+          <p:cNvPr id="6" name="图片 5" descr="Black_4cm_20261025_151112"/>
+          <p:cNvPicPr>
+            <a:picLocks noChangeAspect="1"/>
+          </p:cNvPicPr>
           <p:nvPr/>
-        </p:nvSpPr>
+        </p:nvPicPr>
+        <p:blipFill>
+          <a:blip r:embed="rId2"/>
+          <a:stretch>
+            <a:fillRect/>
+          </a:stretch>
+        </p:blipFill>
         <p:spPr>
           <a:xfrm>
-            <a:off x="578485" y="479425"/>
-            <a:ext cx="3048000" cy="368300"/>
+            <a:off x="3402965" y="4603750"/>
+            <a:ext cx="5741035" cy="2225040"/>
           </a:xfrm>
           <a:prstGeom prst="rect">
             <a:avLst/>
           </a:prstGeom>
-          <a:noFill/>
-        </p:spPr>
-        <p:txBody>
-          <a:bodyPr wrap="square" rtlCol="0">
-            <a:spAutoFit/>
-          </a:bodyPr>
-          <a:p>
-            <a:r>
-              <a:rPr lang="zh-CN" altLang="en-US"/>
-              <a:t>性能总对比</a:t>
-            </a:r>
-            <a:endParaRPr lang="zh-CN" altLang="en-US"/>
-          </a:p>
-        </p:txBody>
-      </p:sp>
-      <p:sp>
-        <p:nvSpPr>
-          <p:cNvPr id="4" name="文本框 3"/>
-          <p:cNvSpPr txBox="1"/>
+        </p:spPr>
+      </p:pic>
+      <p:pic>
+        <p:nvPicPr>
+          <p:cNvPr id="9" name="图片 8" descr="Black_4cm_20261025_151147"/>
+          <p:cNvPicPr>
+            <a:picLocks noChangeAspect="1"/>
+          </p:cNvPicPr>
           <p:nvPr/>
-        </p:nvSpPr>
+        </p:nvPicPr>
+        <p:blipFill>
+          <a:blip r:embed="rId3"/>
+          <a:stretch>
+            <a:fillRect/>
+          </a:stretch>
+        </p:blipFill>
         <p:spPr>
           <a:xfrm>
-            <a:off x="578485" y="1021080"/>
-            <a:ext cx="7668260" cy="922020"/>
+            <a:off x="3403600" y="0"/>
+            <a:ext cx="5740400" cy="2124075"/>
           </a:xfrm>
           <a:prstGeom prst="rect">
             <a:avLst/>
           </a:prstGeom>
-          <a:noFill/>
-        </p:spPr>
-        <p:txBody>
-          <a:bodyPr wrap="square" rtlCol="0">
-            <a:spAutoFit/>
-          </a:bodyPr>
-          <a:p>
-            <a:r>
-              <a:rPr lang="zh-CN" altLang="en-US">
-                <a:ea typeface="SimSun" panose="02010600030101010101" pitchFamily="2" charset="-122"/>
-              </a:rPr>
-              <a:t>目前使用</a:t>
-            </a:r>
-            <a:r>
-              <a:rPr lang="en-US" altLang="zh-CN">
-                <a:ea typeface="SimSun" panose="02010600030101010101" pitchFamily="2" charset="-122"/>
-              </a:rPr>
-              <a:t>3</a:t>
-            </a:r>
-            <a:r>
-              <a:rPr lang="zh-CN" altLang="en-US">
-                <a:ea typeface="SimSun" panose="02010600030101010101" pitchFamily="2" charset="-122"/>
-              </a:rPr>
-              <a:t>种模型。</a:t>
-            </a:r>
-            <a:endParaRPr lang="zh-CN" altLang="en-US">
-              <a:ea typeface="SimSun" panose="02010600030101010101" pitchFamily="2" charset="-122"/>
-            </a:endParaRPr>
-          </a:p>
-          <a:p>
-            <a:endParaRPr lang="zh-CN" altLang="en-US">
-              <a:ea typeface="SimSun" panose="02010600030101010101" pitchFamily="2" charset="-122"/>
-            </a:endParaRPr>
-          </a:p>
-          <a:p>
-            <a:r>
-              <a:rPr lang="en-US" altLang="zh-CN">
-                <a:ea typeface="SimSun" panose="02010600030101010101" pitchFamily="2" charset="-122"/>
-              </a:rPr>
-              <a:t>smoothing spline</a:t>
-            </a:r>
-            <a:r>
-              <a:rPr lang="zh-CN" altLang="en-US">
-                <a:ea typeface="SimSun" panose="02010600030101010101" pitchFamily="2" charset="-122"/>
-              </a:rPr>
-              <a:t>，</a:t>
-            </a:r>
-            <a:r>
-              <a:rPr lang="en-US" altLang="zh-CN">
-                <a:ea typeface="SimSun" panose="02010600030101010101" pitchFamily="2" charset="-122"/>
-              </a:rPr>
-              <a:t>MLP (5 frames)</a:t>
-            </a:r>
-            <a:r>
-              <a:rPr lang="zh-CN" altLang="en-US">
-                <a:ea typeface="SimSun" panose="02010600030101010101" pitchFamily="2" charset="-122"/>
-              </a:rPr>
-              <a:t>，</a:t>
-            </a:r>
-            <a:r>
-              <a:rPr lang="en-US" altLang="zh-CN">
-                <a:ea typeface="SimSun" panose="02010600030101010101" pitchFamily="2" charset="-122"/>
-              </a:rPr>
-              <a:t>(from time 0 to the estimated time)</a:t>
-            </a:r>
-            <a:endParaRPr lang="en-US" altLang="zh-CN">
-              <a:ea typeface="SimSun" panose="02010600030101010101" pitchFamily="2" charset="-122"/>
-            </a:endParaRPr>
-          </a:p>
-        </p:txBody>
-      </p:sp>
+        </p:spPr>
+      </p:pic>
     </p:spTree>
   </p:cSld>
   <p:clrMapOvr>
@@ -4029,16 +4011,18 @@
           </a:bodyPr>
           <a:p>
             <a:r>
-              <a:rPr lang="en-US" altLang="zh-CN"/>
-              <a:t>Slow Example</a:t>
-            </a:r>
-            <a:endParaRPr lang="en-US" altLang="zh-CN"/>
+              <a:rPr lang="en-US" altLang="zh-CN">
+                <a:sym typeface="+mn-ea"/>
+              </a:rPr>
+              <a:t>Normal Example</a:t>
+            </a:r>
+            <a:endParaRPr lang="zh-CN" altLang="en-US"/>
           </a:p>
         </p:txBody>
       </p:sp>
       <p:pic>
         <p:nvPicPr>
-          <p:cNvPr id="3" name="图片 2" descr="Black_4cm_20261025_151105"/>
+          <p:cNvPr id="3" name="图片 2" descr="Black_4cm_20261025_150204"/>
           <p:cNvPicPr>
             <a:picLocks noChangeAspect="1"/>
           </p:cNvPicPr>
@@ -4052,8 +4036,8 @@
         </p:blipFill>
         <p:spPr>
           <a:xfrm>
-            <a:off x="3495675" y="2245360"/>
-            <a:ext cx="5648325" cy="2237105"/>
+            <a:off x="3236595" y="2145665"/>
+            <a:ext cx="5683250" cy="2324735"/>
           </a:xfrm>
           <a:prstGeom prst="rect">
             <a:avLst/>
@@ -4062,7 +4046,7 @@
       </p:pic>
       <p:pic>
         <p:nvPicPr>
-          <p:cNvPr id="6" name="图片 5" descr="Black_4cm_20261025_151112"/>
+          <p:cNvPr id="6" name="图片 5" descr="Black_4cm_20261025_150010"/>
           <p:cNvPicPr>
             <a:picLocks noChangeAspect="1"/>
           </p:cNvPicPr>
@@ -4076,8 +4060,8 @@
         </p:blipFill>
         <p:spPr>
           <a:xfrm>
-            <a:off x="3402965" y="4603750"/>
-            <a:ext cx="5741035" cy="2225040"/>
+            <a:off x="3153410" y="4582160"/>
+            <a:ext cx="5891530" cy="2176145"/>
           </a:xfrm>
           <a:prstGeom prst="rect">
             <a:avLst/>
@@ -4086,7 +4070,7 @@
       </p:pic>
       <p:pic>
         <p:nvPicPr>
-          <p:cNvPr id="9" name="图片 8" descr="Black_4cm_20261025_151147"/>
+          <p:cNvPr id="7" name="图片 6" descr="Black_4cm_20261025_150052"/>
           <p:cNvPicPr>
             <a:picLocks noChangeAspect="1"/>
           </p:cNvPicPr>
@@ -4100,8 +4084,8 @@
         </p:blipFill>
         <p:spPr>
           <a:xfrm>
-            <a:off x="3403600" y="0"/>
-            <a:ext cx="5740400" cy="2124075"/>
+            <a:off x="3011805" y="0"/>
+            <a:ext cx="6132195" cy="2145665"/>
           </a:xfrm>
           <a:prstGeom prst="rect">
             <a:avLst/>
@@ -4158,7 +4142,7 @@
               <a:rPr lang="en-US" altLang="zh-CN">
                 <a:sym typeface="+mn-ea"/>
               </a:rPr>
-              <a:t>Normal Example</a:t>
+              <a:t>Fast Example</a:t>
             </a:r>
             <a:endParaRPr lang="zh-CN" altLang="en-US"/>
           </a:p>
@@ -4166,7 +4150,7 @@
       </p:sp>
       <p:pic>
         <p:nvPicPr>
-          <p:cNvPr id="3" name="图片 2" descr="Black_4cm_20261025_150204"/>
+          <p:cNvPr id="3" name="图片 2" descr="Black_4cm_20261025_143905"/>
           <p:cNvPicPr>
             <a:picLocks noChangeAspect="1"/>
           </p:cNvPicPr>
@@ -4180,8 +4164,8 @@
         </p:blipFill>
         <p:spPr>
           <a:xfrm>
-            <a:off x="3236595" y="2145665"/>
-            <a:ext cx="5683250" cy="2324735"/>
+            <a:off x="2699385" y="2635885"/>
+            <a:ext cx="6353810" cy="1983105"/>
           </a:xfrm>
           <a:prstGeom prst="rect">
             <a:avLst/>
@@ -4190,7 +4174,7 @@
       </p:pic>
       <p:pic>
         <p:nvPicPr>
-          <p:cNvPr id="6" name="图片 5" descr="Black_4cm_20261025_150010"/>
+          <p:cNvPr id="6" name="图片 5" descr="Black_4cm_20261025_143725"/>
           <p:cNvPicPr>
             <a:picLocks noChangeAspect="1"/>
           </p:cNvPicPr>
@@ -4204,8 +4188,8 @@
         </p:blipFill>
         <p:spPr>
           <a:xfrm>
-            <a:off x="3153410" y="4582160"/>
-            <a:ext cx="5891530" cy="2176145"/>
+            <a:off x="2699385" y="4618355"/>
+            <a:ext cx="6353810" cy="2170430"/>
           </a:xfrm>
           <a:prstGeom prst="rect">
             <a:avLst/>
@@ -4214,7 +4198,7 @@
       </p:pic>
       <p:pic>
         <p:nvPicPr>
-          <p:cNvPr id="7" name="图片 6" descr="Black_4cm_20261025_150052"/>
+          <p:cNvPr id="7" name="图片 6" descr="Black_4cm_20261025_143750"/>
           <p:cNvPicPr>
             <a:picLocks noChangeAspect="1"/>
           </p:cNvPicPr>
@@ -4228,8 +4212,8 @@
         </p:blipFill>
         <p:spPr>
           <a:xfrm>
-            <a:off x="3011805" y="0"/>
-            <a:ext cx="6132195" cy="2145665"/>
+            <a:off x="2699385" y="0"/>
+            <a:ext cx="6444615" cy="2635885"/>
           </a:xfrm>
           <a:prstGeom prst="rect">
             <a:avLst/>
@@ -4263,14 +4247,14 @@
       <p:grpSpPr/>
       <p:sp>
         <p:nvSpPr>
-          <p:cNvPr id="8" name="文本框 7"/>
+          <p:cNvPr id="6" name="文本框 5"/>
           <p:cNvSpPr txBox="1"/>
           <p:nvPr/>
         </p:nvSpPr>
         <p:spPr>
           <a:xfrm>
-            <a:off x="283845" y="379730"/>
-            <a:ext cx="3048000" cy="368300"/>
+            <a:off x="63500" y="99060"/>
+            <a:ext cx="2811780" cy="368300"/>
           </a:xfrm>
           <a:prstGeom prst="rect">
             <a:avLst/>
@@ -4283,18 +4267,16 @@
           </a:bodyPr>
           <a:p>
             <a:r>
-              <a:rPr lang="en-US" altLang="zh-CN">
-                <a:sym typeface="+mn-ea"/>
-              </a:rPr>
-              <a:t>Fast Example</a:t>
-            </a:r>
-            <a:endParaRPr lang="zh-CN" altLang="en-US"/>
+              <a:rPr lang="en-US" altLang="zh-CN"/>
+              <a:t>Detailed Validation Results</a:t>
+            </a:r>
+            <a:endParaRPr lang="en-US" altLang="zh-CN"/>
           </a:p>
         </p:txBody>
       </p:sp>
       <p:pic>
         <p:nvPicPr>
-          <p:cNvPr id="3" name="图片 2" descr="Black_4cm_20261025_143905"/>
+          <p:cNvPr id="2" name="图片 1" descr="test_metrics_chart"/>
           <p:cNvPicPr>
             <a:picLocks noChangeAspect="1"/>
           </p:cNvPicPr>
@@ -4308,56 +4290,8 @@
         </p:blipFill>
         <p:spPr>
           <a:xfrm>
-            <a:off x="2699385" y="2635885"/>
-            <a:ext cx="6353810" cy="1983105"/>
-          </a:xfrm>
-          <a:prstGeom prst="rect">
-            <a:avLst/>
-          </a:prstGeom>
-        </p:spPr>
-      </p:pic>
-      <p:pic>
-        <p:nvPicPr>
-          <p:cNvPr id="6" name="图片 5" descr="Black_4cm_20261025_143725"/>
-          <p:cNvPicPr>
-            <a:picLocks noChangeAspect="1"/>
-          </p:cNvPicPr>
-          <p:nvPr/>
-        </p:nvPicPr>
-        <p:blipFill>
-          <a:blip r:embed="rId2"/>
-          <a:stretch>
-            <a:fillRect/>
-          </a:stretch>
-        </p:blipFill>
-        <p:spPr>
-          <a:xfrm>
-            <a:off x="2699385" y="4618355"/>
-            <a:ext cx="6353810" cy="2170430"/>
-          </a:xfrm>
-          <a:prstGeom prst="rect">
-            <a:avLst/>
-          </a:prstGeom>
-        </p:spPr>
-      </p:pic>
-      <p:pic>
-        <p:nvPicPr>
-          <p:cNvPr id="7" name="图片 6" descr="Black_4cm_20261025_143750"/>
-          <p:cNvPicPr>
-            <a:picLocks noChangeAspect="1"/>
-          </p:cNvPicPr>
-          <p:nvPr/>
-        </p:nvPicPr>
-        <p:blipFill>
-          <a:blip r:embed="rId3"/>
-          <a:stretch>
-            <a:fillRect/>
-          </a:stretch>
-        </p:blipFill>
-        <p:spPr>
-          <a:xfrm>
-            <a:off x="2699385" y="0"/>
-            <a:ext cx="6444615" cy="2635885"/>
+            <a:off x="1534795" y="467360"/>
+            <a:ext cx="7451725" cy="6334125"/>
           </a:xfrm>
           <a:prstGeom prst="rect">
             <a:avLst/>
@@ -4391,14 +4325,14 @@
       <p:grpSpPr/>
       <p:sp>
         <p:nvSpPr>
-          <p:cNvPr id="6" name="文本框 5"/>
+          <p:cNvPr id="4" name="文本框 3"/>
           <p:cNvSpPr txBox="1"/>
           <p:nvPr/>
         </p:nvSpPr>
         <p:spPr>
           <a:xfrm>
-            <a:off x="63500" y="99060"/>
-            <a:ext cx="2811780" cy="368300"/>
+            <a:off x="327660" y="243840"/>
+            <a:ext cx="6380480" cy="922020"/>
           </a:xfrm>
           <a:prstGeom prst="rect">
             <a:avLst/>
@@ -4411,8 +4345,28 @@
           </a:bodyPr>
           <a:p>
             <a:r>
+              <a:rPr lang="en-US" altLang="zh-CN">
+                <a:ea typeface="SimSun" panose="02010600030101010101" pitchFamily="2" charset="-122"/>
+              </a:rPr>
+              <a:t>Real-time</a:t>
+            </a:r>
+            <a:r>
+              <a:rPr lang="en-US" altLang="zh-CN">
+                <a:sym typeface="+mn-ea"/>
+              </a:rPr>
+              <a:t>: Overall Performance</a:t>
+            </a:r>
+            <a:endParaRPr lang="en-US" altLang="zh-CN">
+              <a:sym typeface="+mn-ea"/>
+            </a:endParaRPr>
+          </a:p>
+          <a:p>
+            <a:endParaRPr lang="en-US" altLang="zh-CN"/>
+          </a:p>
+          <a:p>
+            <a:r>
               <a:rPr lang="en-US" altLang="zh-CN"/>
-              <a:t>Detailed Validation Results</a:t>
+              <a:t>Three grasping trials per speed condition, for a total of nine trials.</a:t>
             </a:r>
             <a:endParaRPr lang="en-US" altLang="zh-CN"/>
           </a:p>
@@ -4420,7 +4374,7 @@
       </p:sp>
       <p:pic>
         <p:nvPicPr>
-          <p:cNvPr id="2" name="图片 1" descr="test_metrics_chart"/>
+          <p:cNvPr id="2" name="图片 1" descr="07_trial_mean_sd"/>
           <p:cNvPicPr>
             <a:picLocks noChangeAspect="1"/>
           </p:cNvPicPr>
@@ -4434,14 +4388,52 @@
         </p:blipFill>
         <p:spPr>
           <a:xfrm>
-            <a:off x="1534795" y="467360"/>
-            <a:ext cx="7451725" cy="6334125"/>
+            <a:off x="0" y="3300730"/>
+            <a:ext cx="9144000" cy="3164840"/>
           </a:xfrm>
           <a:prstGeom prst="rect">
             <a:avLst/>
           </a:prstGeom>
         </p:spPr>
       </p:pic>
+      <p:sp>
+        <p:nvSpPr>
+          <p:cNvPr id="3" name="文本框 2"/>
+          <p:cNvSpPr txBox="1"/>
+          <p:nvPr/>
+        </p:nvSpPr>
+        <p:spPr>
+          <a:xfrm>
+            <a:off x="327660" y="1845310"/>
+            <a:ext cx="8472805" cy="583565"/>
+          </a:xfrm>
+          <a:prstGeom prst="rect">
+            <a:avLst/>
+          </a:prstGeom>
+        </p:spPr>
+        <p:txBody>
+          <a:bodyPr wrap="square">
+            <a:spAutoFit/>
+          </a:bodyPr>
+          <a:p>
+            <a:r>
+              <a:rPr lang="en-US" altLang="zh-CN" sz="1600"/>
+              <a:t>Problem</a:t>
+            </a:r>
+            <a:r>
+              <a:rPr lang="zh-CN" altLang="en-US" sz="1600">
+                <a:ea typeface="SimSun" panose="02010600030101010101" pitchFamily="2" charset="-122"/>
+              </a:rPr>
+              <a:t>：</a:t>
+            </a:r>
+            <a:r>
+              <a:rPr lang="en-US" altLang="zh-CN" sz="1600"/>
+              <a:t>The LSTM predictions currently keep increasing during the initial phase, making the model unsuitable for real-time inference at this stage. I will investigate this issue further.</a:t>
+            </a:r>
+            <a:endParaRPr lang="en-US" altLang="zh-CN" sz="1600"/>
+          </a:p>
+        </p:txBody>
+      </p:sp>
     </p:spTree>
   </p:cSld>
   <p:clrMapOvr>
@@ -4467,186 +4459,6 @@
         <p:nvPr/>
       </p:nvGrpSpPr>
       <p:grpSpPr/>
-      <p:sp>
-        <p:nvSpPr>
-          <p:cNvPr id="4" name="文本框 3"/>
-          <p:cNvSpPr txBox="1"/>
-          <p:nvPr/>
-        </p:nvSpPr>
-        <p:spPr>
-          <a:xfrm>
-            <a:off x="327660" y="243840"/>
-            <a:ext cx="3048000" cy="368300"/>
-          </a:xfrm>
-          <a:prstGeom prst="rect">
-            <a:avLst/>
-          </a:prstGeom>
-          <a:noFill/>
-        </p:spPr>
-        <p:txBody>
-          <a:bodyPr wrap="square" rtlCol="0">
-            <a:spAutoFit/>
-          </a:bodyPr>
-          <a:p>
-            <a:r>
-              <a:rPr lang="en-US" altLang="zh-CN"/>
-              <a:t>Real-time </a:t>
-            </a:r>
-            <a:r>
-              <a:rPr lang="zh-CN" altLang="en-US">
-                <a:ea typeface="SimSun" panose="02010600030101010101" pitchFamily="2" charset="-122"/>
-              </a:rPr>
-              <a:t>表现</a:t>
-            </a:r>
-            <a:endParaRPr lang="zh-CN" altLang="en-US">
-              <a:ea typeface="SimSun" panose="02010600030101010101" pitchFamily="2" charset="-122"/>
-            </a:endParaRPr>
-          </a:p>
-        </p:txBody>
-      </p:sp>
-      <p:sp>
-        <p:nvSpPr>
-          <p:cNvPr id="5" name="文本框 4"/>
-          <p:cNvSpPr txBox="1"/>
-          <p:nvPr/>
-        </p:nvSpPr>
-        <p:spPr>
-          <a:xfrm>
-            <a:off x="327660" y="853440"/>
-            <a:ext cx="3048000" cy="368300"/>
-          </a:xfrm>
-          <a:prstGeom prst="rect">
-            <a:avLst/>
-          </a:prstGeom>
-          <a:noFill/>
-        </p:spPr>
-        <p:txBody>
-          <a:bodyPr wrap="square" rtlCol="0">
-            <a:spAutoFit/>
-          </a:bodyPr>
-          <a:p>
-            <a:r>
-              <a:rPr lang="zh-CN" altLang="en-US"/>
-              <a:t>各速度抓取</a:t>
-            </a:r>
-            <a:r>
-              <a:rPr lang="en-US" altLang="zh-CN"/>
-              <a:t>3</a:t>
-            </a:r>
-            <a:r>
-              <a:rPr lang="zh-CN" altLang="en-US">
-                <a:ea typeface="SimSun" panose="02010600030101010101" pitchFamily="2" charset="-122"/>
-              </a:rPr>
-              <a:t>次，共</a:t>
-            </a:r>
-            <a:r>
-              <a:rPr lang="en-US" altLang="zh-CN">
-                <a:ea typeface="SimSun" panose="02010600030101010101" pitchFamily="2" charset="-122"/>
-              </a:rPr>
-              <a:t>9</a:t>
-            </a:r>
-            <a:r>
-              <a:rPr lang="zh-CN" altLang="en-US">
-                <a:ea typeface="SimSun" panose="02010600030101010101" pitchFamily="2" charset="-122"/>
-              </a:rPr>
-              <a:t>组</a:t>
-            </a:r>
-            <a:endParaRPr lang="zh-CN" altLang="en-US">
-              <a:ea typeface="SimSun" panose="02010600030101010101" pitchFamily="2" charset="-122"/>
-            </a:endParaRPr>
-          </a:p>
-        </p:txBody>
-      </p:sp>
-      <p:sp>
-        <p:nvSpPr>
-          <p:cNvPr id="7" name="文本框 6"/>
-          <p:cNvSpPr txBox="1"/>
-          <p:nvPr/>
-        </p:nvSpPr>
-        <p:spPr>
-          <a:xfrm>
-            <a:off x="327660" y="1633855"/>
-            <a:ext cx="8463280" cy="645160"/>
-          </a:xfrm>
-          <a:prstGeom prst="rect">
-            <a:avLst/>
-          </a:prstGeom>
-          <a:noFill/>
-        </p:spPr>
-        <p:txBody>
-          <a:bodyPr wrap="square" rtlCol="0" anchor="t">
-            <a:spAutoFit/>
-          </a:bodyPr>
-          <a:p>
-            <a:r>
-              <a:rPr lang="en-US" altLang="zh-CN">
-                <a:sym typeface="+mn-ea"/>
-              </a:rPr>
-              <a:t>LSTM</a:t>
-            </a:r>
-            <a:r>
-              <a:rPr lang="zh-CN" altLang="en-US">
-                <a:ea typeface="SimSun" panose="02010600030101010101" pitchFamily="2" charset="-122"/>
-                <a:sym typeface="+mn-ea"/>
-              </a:rPr>
-              <a:t>现在有一个问题就是，初始阶段会不断增大。之后会关注这个问题，目前实时推理不能使用</a:t>
-            </a:r>
-            <a:endParaRPr lang="zh-CN" altLang="en-US">
-              <a:ea typeface="SimSun" panose="02010600030101010101" pitchFamily="2" charset="-122"/>
-              <a:sym typeface="+mn-ea"/>
-            </a:endParaRPr>
-          </a:p>
-        </p:txBody>
-      </p:sp>
-      <p:pic>
-        <p:nvPicPr>
-          <p:cNvPr id="2" name="图片 1" descr="07_trial_mean_sd"/>
-          <p:cNvPicPr>
-            <a:picLocks noChangeAspect="1"/>
-          </p:cNvPicPr>
-          <p:nvPr/>
-        </p:nvPicPr>
-        <p:blipFill>
-          <a:blip r:embed="rId1"/>
-          <a:stretch>
-            <a:fillRect/>
-          </a:stretch>
-        </p:blipFill>
-        <p:spPr>
-          <a:xfrm>
-            <a:off x="0" y="3300730"/>
-            <a:ext cx="9144000" cy="3164840"/>
-          </a:xfrm>
-          <a:prstGeom prst="rect">
-            <a:avLst/>
-          </a:prstGeom>
-        </p:spPr>
-      </p:pic>
-    </p:spTree>
-  </p:cSld>
-  <p:clrMapOvr>
-    <a:masterClrMapping/>
-  </p:clrMapOvr>
-  <p:timing>
-    <p:tnLst>
-      <p:par>
-        <p:cTn id="1" dur="indefinite" restart="never" nodeType="tmRoot"/>
-      </p:par>
-    </p:tnLst>
-  </p:timing>
-</p:sld>
-</file>
-
-<file path=ppt/slides/slide9.xml><?xml version="1.0" encoding="utf-8"?>
-<p:sld xmlns:a="http://schemas.openxmlformats.org/drawingml/2006/main" xmlns:r="http://schemas.openxmlformats.org/officeDocument/2006/relationships" xmlns:p="http://schemas.openxmlformats.org/presentationml/2006/main">
-  <p:cSld>
-    <p:spTree>
-      <p:nvGrpSpPr>
-        <p:cNvPr id="1" name=""/>
-        <p:cNvGrpSpPr/>
-        <p:nvPr/>
-      </p:nvGrpSpPr>
-      <p:grpSpPr/>
       <p:pic>
         <p:nvPicPr>
           <p:cNvPr id="2" name="图片 1" descr="06_prediction_trajectories"/>
@@ -4663,7 +4475,7 @@
         </p:blipFill>
         <p:spPr>
           <a:xfrm>
-            <a:off x="90170" y="1075690"/>
+            <a:off x="90170" y="842010"/>
             <a:ext cx="8564245" cy="5709285"/>
           </a:xfrm>
           <a:prstGeom prst="rect">
